--- a/Write Ups/Midway Presentation.pptx
+++ b/Write Ups/Midway Presentation.pptx
@@ -119,6 +119,11 @@
       </a:defRPr>
     </a:lvl9pPr>
   </p:defaultTextStyle>
+  <p:extLst>
+    <p:ext uri="{EFAFB233-063F-42B5-8137-9DF3F51BA10A}">
+      <p15:sldGuideLst xmlns:p15="http://schemas.microsoft.com/office/powerpoint/2012/main"/>
+    </p:ext>
+  </p:extLst>
 </p:presentation>
 </file>
 
@@ -3682,7 +3687,7 @@
           <a:p>
             <a:fld id="{388ED7F3-BDC0-4E01-B727-F7B567EF5B3F}" type="datetimeFigureOut">
               <a:rPr lang="en-IE" smtClean="0"/>
-              <a:t>05/01/2026</a:t>
+              <a:t>14/01/2026</a:t>
             </a:fld>
             <a:endParaRPr lang="en-IE"/>
           </a:p>
@@ -4215,7 +4220,7 @@
           <a:p>
             <a:fld id="{AC2EAE4B-7CCD-44D5-8B66-978E65139741}" type="datetimeFigureOut">
               <a:rPr lang="en-IE" smtClean="0"/>
-              <a:t>05/01/2026</a:t>
+              <a:t>14/01/2026</a:t>
             </a:fld>
             <a:endParaRPr lang="en-IE"/>
           </a:p>
@@ -4415,7 +4420,7 @@
           <a:p>
             <a:fld id="{AC2EAE4B-7CCD-44D5-8B66-978E65139741}" type="datetimeFigureOut">
               <a:rPr lang="en-IE" smtClean="0"/>
-              <a:t>05/01/2026</a:t>
+              <a:t>14/01/2026</a:t>
             </a:fld>
             <a:endParaRPr lang="en-IE"/>
           </a:p>
@@ -4625,7 +4630,7 @@
           <a:p>
             <a:fld id="{AC2EAE4B-7CCD-44D5-8B66-978E65139741}" type="datetimeFigureOut">
               <a:rPr lang="en-IE" smtClean="0"/>
-              <a:t>05/01/2026</a:t>
+              <a:t>14/01/2026</a:t>
             </a:fld>
             <a:endParaRPr lang="en-IE"/>
           </a:p>
@@ -4825,7 +4830,7 @@
           <a:p>
             <a:fld id="{AC2EAE4B-7CCD-44D5-8B66-978E65139741}" type="datetimeFigureOut">
               <a:rPr lang="en-IE" smtClean="0"/>
-              <a:t>05/01/2026</a:t>
+              <a:t>14/01/2026</a:t>
             </a:fld>
             <a:endParaRPr lang="en-IE"/>
           </a:p>
@@ -5101,7 +5106,7 @@
           <a:p>
             <a:fld id="{AC2EAE4B-7CCD-44D5-8B66-978E65139741}" type="datetimeFigureOut">
               <a:rPr lang="en-IE" smtClean="0"/>
-              <a:t>05/01/2026</a:t>
+              <a:t>14/01/2026</a:t>
             </a:fld>
             <a:endParaRPr lang="en-IE"/>
           </a:p>
@@ -5369,7 +5374,7 @@
           <a:p>
             <a:fld id="{AC2EAE4B-7CCD-44D5-8B66-978E65139741}" type="datetimeFigureOut">
               <a:rPr lang="en-IE" smtClean="0"/>
-              <a:t>05/01/2026</a:t>
+              <a:t>14/01/2026</a:t>
             </a:fld>
             <a:endParaRPr lang="en-IE"/>
           </a:p>
@@ -5784,7 +5789,7 @@
           <a:p>
             <a:fld id="{AC2EAE4B-7CCD-44D5-8B66-978E65139741}" type="datetimeFigureOut">
               <a:rPr lang="en-IE" smtClean="0"/>
-              <a:t>05/01/2026</a:t>
+              <a:t>14/01/2026</a:t>
             </a:fld>
             <a:endParaRPr lang="en-IE"/>
           </a:p>
@@ -5926,7 +5931,7 @@
           <a:p>
             <a:fld id="{AC2EAE4B-7CCD-44D5-8B66-978E65139741}" type="datetimeFigureOut">
               <a:rPr lang="en-IE" smtClean="0"/>
-              <a:t>05/01/2026</a:t>
+              <a:t>14/01/2026</a:t>
             </a:fld>
             <a:endParaRPr lang="en-IE"/>
           </a:p>
@@ -6039,7 +6044,7 @@
           <a:p>
             <a:fld id="{AC2EAE4B-7CCD-44D5-8B66-978E65139741}" type="datetimeFigureOut">
               <a:rPr lang="en-IE" smtClean="0"/>
-              <a:t>05/01/2026</a:t>
+              <a:t>14/01/2026</a:t>
             </a:fld>
             <a:endParaRPr lang="en-IE"/>
           </a:p>
@@ -6352,7 +6357,7 @@
           <a:p>
             <a:fld id="{AC2EAE4B-7CCD-44D5-8B66-978E65139741}" type="datetimeFigureOut">
               <a:rPr lang="en-IE" smtClean="0"/>
-              <a:t>05/01/2026</a:t>
+              <a:t>14/01/2026</a:t>
             </a:fld>
             <a:endParaRPr lang="en-IE"/>
           </a:p>
@@ -6641,7 +6646,7 @@
           <a:p>
             <a:fld id="{AC2EAE4B-7CCD-44D5-8B66-978E65139741}" type="datetimeFigureOut">
               <a:rPr lang="en-IE" smtClean="0"/>
-              <a:t>05/01/2026</a:t>
+              <a:t>14/01/2026</a:t>
             </a:fld>
             <a:endParaRPr lang="en-IE"/>
           </a:p>
@@ -6884,7 +6889,7 @@
           <a:p>
             <a:fld id="{AC2EAE4B-7CCD-44D5-8B66-978E65139741}" type="datetimeFigureOut">
               <a:rPr lang="en-IE" smtClean="0"/>
-              <a:t>05/01/2026</a:t>
+              <a:t>14/01/2026</a:t>
             </a:fld>
             <a:endParaRPr lang="en-IE"/>
           </a:p>
@@ -8878,45 +8883,6 @@
           </a:p>
         </p:txBody>
       </p:sp>
-      <p:pic>
-        <p:nvPicPr>
-          <p:cNvPr id="8" name="Picture Placeholder 7">
-            <a:extLst>
-              <a:ext uri="{FF2B5EF4-FFF2-40B4-BE49-F238E27FC236}">
-                <a16:creationId xmlns:a16="http://schemas.microsoft.com/office/drawing/2014/main" id="{28B2E32F-EAB8-0113-14E3-CA27B64892A4}"/>
-              </a:ext>
-            </a:extLst>
-          </p:cNvPr>
-          <p:cNvPicPr>
-            <a:picLocks noGrp="1" noChangeAspect="1"/>
-          </p:cNvPicPr>
-          <p:nvPr>
-            <p:ph type="pic" idx="1"/>
-          </p:nvPr>
-        </p:nvPicPr>
-        <p:blipFill>
-          <a:blip r:embed="rId2">
-            <a:extLst>
-              <a:ext uri="{28A0092B-C50C-407E-A947-70E740481C1C}">
-                <a14:useLocalDpi xmlns:a14="http://schemas.microsoft.com/office/drawing/2010/main" val="0"/>
-              </a:ext>
-            </a:extLst>
-          </a:blip>
-          <a:srcRect l="207" t="-163" r="661" b="163"/>
-          <a:stretch>
-            <a:fillRect/>
-          </a:stretch>
-        </p:blipFill>
-        <p:spPr>
-          <a:xfrm>
-            <a:off x="1046746" y="2676139"/>
-            <a:ext cx="9965250" cy="3895344"/>
-          </a:xfrm>
-          <a:prstGeom prst="rect">
-            <a:avLst/>
-          </a:prstGeom>
-        </p:spPr>
-      </p:pic>
       <p:sp>
         <p:nvSpPr>
           <p:cNvPr id="6" name="AutoShape 4">
@@ -8962,6 +8928,66 @@
           </a:p>
         </p:txBody>
       </p:sp>
+      <p:sp>
+        <p:nvSpPr>
+          <p:cNvPr id="5" name="Picture Placeholder 4">
+            <a:extLst>
+              <a:ext uri="{FF2B5EF4-FFF2-40B4-BE49-F238E27FC236}">
+                <a16:creationId xmlns:a16="http://schemas.microsoft.com/office/drawing/2014/main" id="{F8FCC985-7F65-FA3A-6427-40C4C7BB0CFE}"/>
+              </a:ext>
+            </a:extLst>
+          </p:cNvPr>
+          <p:cNvSpPr>
+            <a:spLocks noGrp="1"/>
+          </p:cNvSpPr>
+          <p:nvPr>
+            <p:ph type="pic" idx="1"/>
+          </p:nvPr>
+        </p:nvSpPr>
+        <p:spPr/>
+        <p:txBody>
+          <a:bodyPr/>
+          <a:lstStyle/>
+          <a:p>
+            <a:endParaRPr lang="en-IE"/>
+          </a:p>
+        </p:txBody>
+      </p:sp>
+      <p:pic>
+        <p:nvPicPr>
+          <p:cNvPr id="7" name="Picture 6">
+            <a:extLst>
+              <a:ext uri="{FF2B5EF4-FFF2-40B4-BE49-F238E27FC236}">
+                <a16:creationId xmlns:a16="http://schemas.microsoft.com/office/drawing/2014/main" id="{8BA9E2E7-3D0B-5939-0689-23CDA9459C39}"/>
+              </a:ext>
+            </a:extLst>
+          </p:cNvPr>
+          <p:cNvPicPr>
+            <a:picLocks noChangeAspect="1"/>
+          </p:cNvPicPr>
+          <p:nvPr/>
+        </p:nvPicPr>
+        <p:blipFill>
+          <a:blip r:embed="rId2">
+            <a:extLst>
+              <a:ext uri="{28A0092B-C50C-407E-A947-70E740481C1C}">
+                <a14:useLocalDpi xmlns:a14="http://schemas.microsoft.com/office/drawing/2010/main" val="0"/>
+              </a:ext>
+            </a:extLst>
+          </a:blip>
+          <a:srcRect t="480" b="480"/>
+          <a:stretch/>
+        </p:blipFill>
+        <p:spPr>
+          <a:xfrm>
+            <a:off x="1978955" y="2387383"/>
+            <a:ext cx="7742561" cy="4032351"/>
+          </a:xfrm>
+          <a:prstGeom prst="rect">
+            <a:avLst/>
+          </a:prstGeom>
+        </p:spPr>
+      </p:pic>
     </p:spTree>
     <p:extLst>
       <p:ext uri="{BB962C8B-B14F-4D97-AF65-F5344CB8AC3E}">

--- a/Write Ups/Midway Presentation.pptx
+++ b/Write Ups/Midway Presentation.pptx
@@ -119,7 +119,18 @@
       </a:defRPr>
     </a:lvl9pPr>
   </p:defaultTextStyle>
+  <p:extLst>
+    <p:ext uri="{EFAFB233-063F-42B5-8137-9DF3F51BA10A}">
+      <p15:sldGuideLst xmlns:p15="http://schemas.microsoft.com/office/powerpoint/2012/main"/>
+    </p:ext>
+  </p:extLst>
 </p:presentation>
+</file>
+
+<file path=ppt/authors.xml><?xml version="1.0" encoding="utf-8"?>
+<p188:authorLst xmlns:a="http://schemas.openxmlformats.org/drawingml/2006/main" xmlns:r="http://schemas.openxmlformats.org/officeDocument/2006/relationships" xmlns:p188="http://schemas.microsoft.com/office/powerpoint/2018/8/main">
+  <p188:author id="{DE1086F0-4495-B227-D4B7-612257E4B3C6}" name="Farrell, Conor" initials="CF" userId="S::C.Farrell42@universityofgalway.ie::fb925228-86ac-4192-9c82-b6d1773b6915" providerId="AD"/>
+</p188:authorLst>
 </file>
 
 <file path=ppt/charts/chart1.xml><?xml version="1.0" encoding="utf-8"?>
@@ -202,8 +213,8 @@
           <c:layoutTarget val="inner"/>
           <c:xMode val="edge"/>
           <c:yMode val="edge"/>
-          <c:x val="9.1434530804984704E-2"/>
-          <c:y val="0.10121302731256027"/>
+          <c:x val="9.3689912053490004E-2"/>
+          <c:y val="0.11075455913835507"/>
           <c:w val="0.86658842338193109"/>
           <c:h val="0.77783533907351476"/>
         </c:manualLayout>
@@ -2802,7 +2813,7 @@
             </a:p>
           </c:txPr>
         </c:title>
-        <c:numFmt formatCode="0.0%" sourceLinked="1"/>
+        <c:numFmt formatCode="0%" sourceLinked="0"/>
         <c:majorTickMark val="none"/>
         <c:minorTickMark val="none"/>
         <c:tickLblPos val="nextTo"/>
@@ -2886,11 +2897,19 @@
                 </a:pPr>
                 <a:r>
                   <a:rPr lang="en-IE" noProof="0" dirty="0"/>
-                  <a:t>η Motor Efficiency</a:t>
+                  <a:t>Motor Efficiency</a:t>
                 </a:r>
               </a:p>
             </c:rich>
           </c:tx>
+          <c:layout>
+            <c:manualLayout>
+              <c:xMode val="edge"/>
+              <c:yMode val="edge"/>
+              <c:x val="0"/>
+              <c:y val="0.41174784594400377"/>
+            </c:manualLayout>
+          </c:layout>
           <c:overlay val="0"/>
           <c:spPr>
             <a:noFill/>
@@ -2920,7 +2939,7 @@
             </a:p>
           </c:txPr>
         </c:title>
-        <c:numFmt formatCode="0.00%" sourceLinked="1"/>
+        <c:numFmt formatCode="0%" sourceLinked="0"/>
         <c:majorTickMark val="none"/>
         <c:minorTickMark val="none"/>
         <c:tickLblPos val="nextTo"/>
@@ -3600,6 +3619,431 @@
 </cs:chartStyle>
 </file>
 
+<file path=ppt/comments/modernComment_101_C71760F6.xml><?xml version="1.0" encoding="utf-8"?>
+<p188:cmLst xmlns:a="http://schemas.openxmlformats.org/drawingml/2006/main" xmlns:r="http://schemas.openxmlformats.org/officeDocument/2006/relationships" xmlns:p188="http://schemas.microsoft.com/office/powerpoint/2018/8/main">
+  <p188:cm id="{986A1DF2-69DC-4607-99E7-019F5F239D60}" authorId="{DE1086F0-4495-B227-D4B7-612257E4B3C6}" created="2026-01-27T18:13:39.865">
+    <pc:sldMkLst xmlns:pc="http://schemas.microsoft.com/office/powerpoint/2013/main/command">
+      <pc:docMk/>
+      <pc:sldMk cId="3340198134" sldId="257"/>
+    </pc:sldMkLst>
+    <p188:txBody>
+      <a:bodyPr/>
+      <a:lstStyle/>
+      <a:p>
+        <a:r>
+          <a:rPr lang="en-IE"/>
+          <a:t>Detailed justification</a:t>
+        </a:r>
+      </a:p>
+    </p188:txBody>
+  </p188:cm>
+  <p188:cm id="{B9BF2A8B-E61C-4869-96ED-4B2932B0075B}" authorId="{DE1086F0-4495-B227-D4B7-612257E4B3C6}" created="2026-01-28T11:02:49.025">
+    <pc:sldMkLst xmlns:pc="http://schemas.microsoft.com/office/powerpoint/2013/main/command">
+      <pc:docMk/>
+      <pc:sldMk cId="3340198134" sldId="257"/>
+    </pc:sldMkLst>
+    <p188:txBody>
+      <a:bodyPr/>
+      <a:lstStyle/>
+      <a:p>
+        <a:r>
+          <a:rPr lang="en-IE"/>
+          <a:t>More baseline detail
+- When it was created
+- Original MOSFET choice vs current choice
+- Actual use of components as deigned</a:t>
+        </a:r>
+      </a:p>
+    </p188:txBody>
+  </p188:cm>
+</p188:cmLst>
+</file>
+
+<file path=ppt/comments/modernComment_102_A19C6967.xml><?xml version="1.0" encoding="utf-8"?>
+<p188:cmLst xmlns:a="http://schemas.openxmlformats.org/drawingml/2006/main" xmlns:r="http://schemas.openxmlformats.org/officeDocument/2006/relationships" xmlns:p188="http://schemas.microsoft.com/office/powerpoint/2018/8/main">
+  <p188:cm id="{2890DB7F-36B8-4DD3-8740-FFB5E17330FA}" authorId="{DE1086F0-4495-B227-D4B7-612257E4B3C6}" created="2026-01-27T18:13:28.641">
+    <pc:sldMkLst xmlns:pc="http://schemas.microsoft.com/office/powerpoint/2013/main/command">
+      <pc:docMk/>
+      <pc:sldMk cId="2711382375" sldId="258"/>
+    </pc:sldMkLst>
+    <p188:txBody>
+      <a:bodyPr/>
+      <a:lstStyle/>
+      <a:p>
+        <a:r>
+          <a:rPr lang="en-IE"/>
+          <a:t>More detail on the overall Goal</a:t>
+        </a:r>
+      </a:p>
+    </p188:txBody>
+  </p188:cm>
+</p188:cmLst>
+</file>
+
+<file path=ppt/comments/modernComment_103_E89ADB5B.xml><?xml version="1.0" encoding="utf-8"?>
+<p188:cmLst xmlns:a="http://schemas.openxmlformats.org/drawingml/2006/main" xmlns:r="http://schemas.openxmlformats.org/officeDocument/2006/relationships" xmlns:p188="http://schemas.microsoft.com/office/powerpoint/2018/8/main">
+  <p188:cm id="{56BC36C1-D2B2-4AE2-86D8-B394572BD490}" authorId="{DE1086F0-4495-B227-D4B7-612257E4B3C6}" created="2026-01-27T18:16:09.459">
+    <pc:sldMkLst xmlns:pc="http://schemas.microsoft.com/office/powerpoint/2013/main/command">
+      <pc:docMk/>
+      <pc:sldMk cId="3902462811" sldId="259"/>
+    </pc:sldMkLst>
+    <p188:txBody>
+      <a:bodyPr/>
+      <a:lstStyle/>
+      <a:p>
+        <a:r>
+          <a:rPr lang="en-IE"/>
+          <a:t>Give more Detail on Cycle by Cycle limiting</a:t>
+        </a:r>
+      </a:p>
+    </p188:txBody>
+  </p188:cm>
+  <p188:cm id="{0AAF83F0-00FE-400F-A20F-575CE958255C}" authorId="{DE1086F0-4495-B227-D4B7-612257E4B3C6}" created="2026-01-27T18:19:54.951">
+    <pc:sldMkLst xmlns:pc="http://schemas.microsoft.com/office/powerpoint/2013/main/command">
+      <pc:docMk/>
+      <pc:sldMk cId="3902462811" sldId="259"/>
+    </pc:sldMkLst>
+    <p188:txBody>
+      <a:bodyPr/>
+      <a:lstStyle/>
+      <a:p>
+        <a:r>
+          <a:rPr lang="en-IE"/>
+          <a:t>Move to Later in the presentation?</a:t>
+        </a:r>
+      </a:p>
+    </p188:txBody>
+  </p188:cm>
+</p188:cmLst>
+</file>
+
+<file path=ppt/comments/modernComment_105_C141AC9F.xml><?xml version="1.0" encoding="utf-8"?>
+<p188:cmLst xmlns:a="http://schemas.openxmlformats.org/drawingml/2006/main" xmlns:r="http://schemas.openxmlformats.org/officeDocument/2006/relationships" xmlns:p188="http://schemas.microsoft.com/office/powerpoint/2018/8/main">
+  <p188:cm id="{E6F1D6D1-0108-4FA9-866C-ECD5E3405CB2}" authorId="{DE1086F0-4495-B227-D4B7-612257E4B3C6}" created="2026-01-28T10:59:30.400">
+    <pc:sldMkLst xmlns:pc="http://schemas.microsoft.com/office/powerpoint/2013/main/command">
+      <pc:docMk/>
+      <pc:sldMk cId="3242306719" sldId="261"/>
+    </pc:sldMkLst>
+    <p188:txBody>
+      <a:bodyPr/>
+      <a:lstStyle/>
+      <a:p>
+        <a:r>
+          <a:rPr lang="en-IE"/>
+          <a:t>Update this picture to recent design</a:t>
+        </a:r>
+      </a:p>
+    </p188:txBody>
+  </p188:cm>
+</p188:cmLst>
+</file>
+
+<file path=ppt/comments/modernComment_106_F961706D.xml><?xml version="1.0" encoding="utf-8"?>
+<p188:cmLst xmlns:a="http://schemas.openxmlformats.org/drawingml/2006/main" xmlns:r="http://schemas.openxmlformats.org/officeDocument/2006/relationships" xmlns:p188="http://schemas.microsoft.com/office/powerpoint/2018/8/main">
+  <p188:cm id="{01607C2C-8EC8-4D0F-900F-A12889B96276}" authorId="{DE1086F0-4495-B227-D4B7-612257E4B3C6}" created="2026-01-28T10:56:33.083">
+    <pc:sldMkLst xmlns:pc="http://schemas.microsoft.com/office/powerpoint/2013/main/command">
+      <pc:docMk/>
+      <pc:sldMk cId="4183912557" sldId="262"/>
+    </pc:sldMkLst>
+    <p188:txBody>
+      <a:bodyPr/>
+      <a:lstStyle/>
+      <a:p>
+        <a:r>
+          <a:rPr lang="en-IE"/>
+          <a:t>More detail on what each IC is rather than stating part numbers</a:t>
+        </a:r>
+      </a:p>
+    </p188:txBody>
+  </p188:cm>
+  <p188:cm id="{1B55E565-7837-4F7D-B6CD-1FFBA52D702E}" authorId="{DE1086F0-4495-B227-D4B7-612257E4B3C6}" created="2026-01-28T10:56:43.402">
+    <pc:sldMkLst xmlns:pc="http://schemas.microsoft.com/office/powerpoint/2013/main/command">
+      <pc:docMk/>
+      <pc:sldMk cId="4183912557" sldId="262"/>
+    </pc:sldMkLst>
+    <p188:txBody>
+      <a:bodyPr/>
+      <a:lstStyle/>
+      <a:p>
+        <a:r>
+          <a:rPr lang="en-IE"/>
+          <a:t>Clean diagram up very messy</a:t>
+        </a:r>
+      </a:p>
+    </p188:txBody>
+  </p188:cm>
+  <p188:cm id="{66A0330C-9B26-40D6-BF07-FEB36D884987}" authorId="{DE1086F0-4495-B227-D4B7-612257E4B3C6}" created="2026-01-28T10:58:07.684">
+    <pc:sldMkLst xmlns:pc="http://schemas.microsoft.com/office/powerpoint/2013/main/command">
+      <pc:docMk/>
+      <pc:sldMk cId="4183912557" sldId="262"/>
+    </pc:sldMkLst>
+    <p188:replyLst>
+      <p188:reply id="{307036CD-322B-4424-B7A7-2437914A217F}" authorId="{DE1086F0-4495-B227-D4B7-612257E4B3C6}" created="2026-01-28T10:58:35.372">
+        <p188:txBody>
+          <a:bodyPr/>
+          <a:lstStyle/>
+          <a:p>
+            <a:r>
+              <a:rPr lang="en-IE"/>
+              <a:t>TVS diodes mentioned in the following slide relevance here or there?</a:t>
+            </a:r>
+          </a:p>
+        </p188:txBody>
+      </p188:reply>
+    </p188:replyLst>
+    <p188:txBody>
+      <a:bodyPr/>
+      <a:lstStyle/>
+      <a:p>
+        <a:r>
+          <a:rPr lang="en-IE"/>
+          <a:t>Where are the TVS diodes why are they there</a:t>
+        </a:r>
+      </a:p>
+    </p188:txBody>
+  </p188:cm>
+</p188:cmLst>
+</file>
+
+<file path=ppt/comments/modernComment_107_14407F06.xml><?xml version="1.0" encoding="utf-8"?>
+<p188:cmLst xmlns:a="http://schemas.openxmlformats.org/drawingml/2006/main" xmlns:r="http://schemas.openxmlformats.org/officeDocument/2006/relationships" xmlns:p188="http://schemas.microsoft.com/office/powerpoint/2018/8/main">
+  <p188:cm id="{52B3F1CF-94CB-49BE-BA8E-93FD8CCD6AED}" authorId="{DE1086F0-4495-B227-D4B7-612257E4B3C6}" created="2026-01-27T18:15:34.799">
+    <pc:sldMkLst xmlns:pc="http://schemas.microsoft.com/office/powerpoint/2013/main/command">
+      <pc:docMk/>
+      <pc:sldMk cId="339771142" sldId="263"/>
+    </pc:sldMkLst>
+    <p188:txBody>
+      <a:bodyPr/>
+      <a:lstStyle/>
+      <a:p>
+        <a:r>
+          <a:rPr lang="en-IE"/>
+          <a:t>Outline  clearly the area where the car operates</a:t>
+        </a:r>
+      </a:p>
+    </p188:txBody>
+  </p188:cm>
+  <p188:cm id="{A847FE72-D716-4CD9-B9F6-2156B3C5585A}" authorId="{DE1086F0-4495-B227-D4B7-612257E4B3C6}" created="2026-01-27T18:15:48.075">
+    <pc:sldMkLst xmlns:pc="http://schemas.microsoft.com/office/powerpoint/2013/main/command">
+      <pc:docMk/>
+      <pc:sldMk cId="339771142" sldId="263"/>
+    </pc:sldMkLst>
+    <p188:txBody>
+      <a:bodyPr/>
+      <a:lstStyle/>
+      <a:p>
+        <a:r>
+          <a:rPr lang="en-IE"/>
+          <a:t>Why the brushed motor is better</a:t>
+        </a:r>
+      </a:p>
+    </p188:txBody>
+  </p188:cm>
+</p188:cmLst>
+</file>
+
+<file path=ppt/comments/modernComment_109_2ACFC3E8.xml><?xml version="1.0" encoding="utf-8"?>
+<p188:cmLst xmlns:a="http://schemas.openxmlformats.org/drawingml/2006/main" xmlns:r="http://schemas.openxmlformats.org/officeDocument/2006/relationships" xmlns:p188="http://schemas.microsoft.com/office/powerpoint/2018/8/main">
+  <p188:cm id="{95CE267B-17BA-40DC-A5DA-5887A1334290}" authorId="{DE1086F0-4495-B227-D4B7-612257E4B3C6}" created="2026-01-28T11:01:41.327">
+    <pc:sldMkLst xmlns:pc="http://schemas.microsoft.com/office/powerpoint/2013/main/command">
+      <pc:docMk/>
+      <pc:sldMk cId="718259176" sldId="265"/>
+    </pc:sldMkLst>
+    <p188:txBody>
+      <a:bodyPr/>
+      <a:lstStyle/>
+      <a:p>
+        <a:r>
+          <a:rPr lang="en-IE"/>
+          <a:t>Overall Goal:
+Set out requirements 
+Show how each have been delivered on.</a:t>
+        </a:r>
+      </a:p>
+    </p188:txBody>
+  </p188:cm>
+</p188:cmLst>
+</file>
+
+<file path=ppt/comments/modernComment_10A_10E0CD6E.xml><?xml version="1.0" encoding="utf-8"?>
+<p188:cmLst xmlns:a="http://schemas.openxmlformats.org/drawingml/2006/main" xmlns:r="http://schemas.openxmlformats.org/officeDocument/2006/relationships" xmlns:p188="http://schemas.microsoft.com/office/powerpoint/2018/8/main">
+  <p188:cm id="{92480DFF-3812-41E5-9B6E-920C94E4900C}" authorId="{DE1086F0-4495-B227-D4B7-612257E4B3C6}" created="2026-01-28T10:33:42.001">
+    <pc:sldMkLst xmlns:pc="http://schemas.microsoft.com/office/powerpoint/2013/main/command">
+      <pc:docMk/>
+      <pc:sldMk cId="283168110" sldId="266"/>
+    </pc:sldMkLst>
+    <p188:txBody>
+      <a:bodyPr/>
+      <a:lstStyle/>
+      <a:p>
+        <a:r>
+          <a:rPr lang="en-IE"/>
+          <a:t>Single Slide with the Circuit</a:t>
+        </a:r>
+      </a:p>
+    </p188:txBody>
+  </p188:cm>
+  <p188:cm id="{B3B6B124-6C7F-4131-ADFE-51FE44ED66C7}" authorId="{DE1086F0-4495-B227-D4B7-612257E4B3C6}" created="2026-01-28T10:45:53.911">
+    <pc:sldMkLst xmlns:pc="http://schemas.microsoft.com/office/powerpoint/2013/main/command">
+      <pc:docMk/>
+      <pc:sldMk cId="283168110" sldId="266"/>
+    </pc:sldMkLst>
+    <p188:txBody>
+      <a:bodyPr/>
+      <a:lstStyle/>
+      <a:p>
+        <a:r>
+          <a:rPr lang="en-IE"/>
+          <a:t>Make graph’s Clearer
+Show V(out) and I(R1)
+V(pwm) and V(comp)</a:t>
+        </a:r>
+      </a:p>
+    </p188:txBody>
+  </p188:cm>
+  <p188:cm id="{A94508A4-4C06-41AA-88E7-FAC67813D0C5}" authorId="{DE1086F0-4495-B227-D4B7-612257E4B3C6}" created="2026-01-28T10:47:19.762">
+    <pc:sldMkLst xmlns:pc="http://schemas.microsoft.com/office/powerpoint/2013/main/command">
+      <pc:docMk/>
+      <pc:sldMk cId="283168110" sldId="266"/>
+    </pc:sldMkLst>
+    <p188:txBody>
+      <a:bodyPr/>
+      <a:lstStyle/>
+      <a:p>
+        <a:r>
+          <a:rPr lang="en-IE"/>
+          <a:t>Some non idealities in the simulation
+Simulating a standard BUCK not a DC motor model - primary reason sim already takes 10mins for 3ms</a:t>
+        </a:r>
+      </a:p>
+    </p188:txBody>
+  </p188:cm>
+</p188:cmLst>
+</file>
+
+<file path=ppt/comments/modernComment_10B_1C810101.xml><?xml version="1.0" encoding="utf-8"?>
+<p188:cmLst xmlns:a="http://schemas.openxmlformats.org/drawingml/2006/main" xmlns:r="http://schemas.openxmlformats.org/officeDocument/2006/relationships" xmlns:p188="http://schemas.microsoft.com/office/powerpoint/2018/8/main">
+  <p188:cm id="{461E363F-F585-47C1-AFB8-9D2484E6EF28}" authorId="{DE1086F0-4495-B227-D4B7-612257E4B3C6}" created="2026-01-28T10:47:49.196">
+    <pc:sldMkLst xmlns:pc="http://schemas.microsoft.com/office/powerpoint/2013/main/command">
+      <pc:docMk/>
+      <pc:sldMk cId="478216449" sldId="267"/>
+    </pc:sldMkLst>
+    <p188:txBody>
+      <a:bodyPr/>
+      <a:lstStyle/>
+      <a:p>
+        <a:r>
+          <a:rPr lang="en-IE"/>
+          <a:t>Add more test graph
+Describe where the signal exists in the signal chain</a:t>
+        </a:r>
+      </a:p>
+    </p188:txBody>
+  </p188:cm>
+  <p188:cm id="{D34BB29B-0160-42EB-9BA0-1A9C40633303}" authorId="{DE1086F0-4495-B227-D4B7-612257E4B3C6}" created="2026-01-28T10:49:39.515">
+    <pc:sldMkLst xmlns:pc="http://schemas.microsoft.com/office/powerpoint/2013/main/command">
+      <pc:docMk/>
+      <pc:sldMk cId="478216449" sldId="267"/>
+    </pc:sldMkLst>
+    <p188:txBody>
+      <a:bodyPr/>
+      <a:lstStyle/>
+      <a:p>
+        <a:r>
+          <a:rPr lang="en-IE"/>
+          <a:t>Describe what the component is and where it exists in the signal chain</a:t>
+        </a:r>
+      </a:p>
+    </p188:txBody>
+  </p188:cm>
+  <p188:cm id="{B73246A9-946C-4456-81B9-6BFD23E549A2}" authorId="{DE1086F0-4495-B227-D4B7-612257E4B3C6}" created="2026-01-28T10:50:48.790">
+    <pc:sldMkLst xmlns:pc="http://schemas.microsoft.com/office/powerpoint/2013/main/command">
+      <pc:docMk/>
+      <pc:sldMk cId="478216449" sldId="267"/>
+    </pc:sldMkLst>
+    <p188:txBody>
+      <a:bodyPr/>
+      <a:lstStyle/>
+      <a:p>
+        <a:r>
+          <a:rPr lang="en-IE"/>
+          <a:t>If done modify this slide to be a remake of the simulation with breadboard build</a:t>
+        </a:r>
+      </a:p>
+    </p188:txBody>
+  </p188:cm>
+</p188:cmLst>
+</file>
+
+<file path=ppt/comments/modernComment_10C_7D4071F4.xml><?xml version="1.0" encoding="utf-8"?>
+<p188:cmLst xmlns:a="http://schemas.openxmlformats.org/drawingml/2006/main" xmlns:r="http://schemas.openxmlformats.org/officeDocument/2006/relationships" xmlns:p188="http://schemas.microsoft.com/office/powerpoint/2018/8/main">
+  <p188:cm id="{AC6D4602-B208-4AED-9546-00B99088EFB3}" authorId="{DE1086F0-4495-B227-D4B7-612257E4B3C6}" created="2026-01-28T10:59:56.888">
+    <pc:sldMkLst xmlns:pc="http://schemas.microsoft.com/office/powerpoint/2013/main/command">
+      <pc:docMk/>
+      <pc:sldMk cId="2101375476" sldId="268"/>
+    </pc:sldMkLst>
+    <p188:txBody>
+      <a:bodyPr/>
+      <a:lstStyle/>
+      <a:p>
+        <a:r>
+          <a:rPr lang="en-IE"/>
+          <a:t>Change with a clear timeline</a:t>
+        </a:r>
+      </a:p>
+    </p188:txBody>
+  </p188:cm>
+  <p188:cm id="{5A101081-E528-4296-AEDD-95C1FA4E0132}" authorId="{DE1086F0-4495-B227-D4B7-612257E4B3C6}" created="2026-01-28T11:00:10.145">
+    <pc:sldMkLst xmlns:pc="http://schemas.microsoft.com/office/powerpoint/2013/main/command">
+      <pc:docMk/>
+      <pc:sldMk cId="2101375476" sldId="268"/>
+    </pc:sldMkLst>
+    <p188:txBody>
+      <a:bodyPr/>
+      <a:lstStyle/>
+      <a:p>
+        <a:r>
+          <a:rPr lang="en-IE"/>
+          <a:t>Replace DAQ with details relevant to my project</a:t>
+        </a:r>
+      </a:p>
+    </p188:txBody>
+  </p188:cm>
+  <p188:cm id="{1F46F08E-A356-4DE7-8C41-883E42115F5E}" authorId="{DE1086F0-4495-B227-D4B7-612257E4B3C6}" created="2026-01-28T11:00:34.069">
+    <pc:sldMkLst xmlns:pc="http://schemas.microsoft.com/office/powerpoint/2013/main/command">
+      <pc:docMk/>
+      <pc:sldMk cId="2101375476" sldId="268"/>
+    </pc:sldMkLst>
+    <p188:txBody>
+      <a:bodyPr/>
+      <a:lstStyle/>
+      <a:p>
+        <a:r>
+          <a:rPr lang="en-IE"/>
+          <a:t>Overall Goal</a:t>
+        </a:r>
+      </a:p>
+    </p188:txBody>
+  </p188:cm>
+  <p188:cm id="{B57F7CF3-1CE9-41CB-BD96-DF0F2E57ACDD}" authorId="{DE1086F0-4495-B227-D4B7-612257E4B3C6}" created="2026-01-28T11:01:02.180">
+    <pc:sldMkLst xmlns:pc="http://schemas.microsoft.com/office/powerpoint/2013/main/command">
+      <pc:docMk/>
+      <pc:sldMk cId="2101375476" sldId="268"/>
+    </pc:sldMkLst>
+    <p188:txBody>
+      <a:bodyPr/>
+      <a:lstStyle/>
+      <a:p>
+        <a:r>
+          <a:rPr lang="en-IE"/>
+          <a:t>Add image from slide 2 here</a:t>
+        </a:r>
+      </a:p>
+    </p188:txBody>
+  </p188:cm>
+</p188:cmLst>
+</file>
+
 <file path=ppt/notesMasters/notesMaster1.xml><?xml version="1.0" encoding="utf-8"?>
 <p:notesMaster xmlns:a="http://schemas.openxmlformats.org/drawingml/2006/main" xmlns:r="http://schemas.openxmlformats.org/officeDocument/2006/relationships" xmlns:p="http://schemas.openxmlformats.org/presentationml/2006/main">
   <p:cSld>
@@ -3682,7 +4126,7 @@
           <a:p>
             <a:fld id="{388ED7F3-BDC0-4E01-B727-F7B567EF5B3F}" type="datetimeFigureOut">
               <a:rPr lang="en-IE" smtClean="0"/>
-              <a:t>05/01/2026</a:t>
+              <a:t>27/01/2026</a:t>
             </a:fld>
             <a:endParaRPr lang="en-IE"/>
           </a:p>
@@ -4215,7 +4659,7 @@
           <a:p>
             <a:fld id="{AC2EAE4B-7CCD-44D5-8B66-978E65139741}" type="datetimeFigureOut">
               <a:rPr lang="en-IE" smtClean="0"/>
-              <a:t>05/01/2026</a:t>
+              <a:t>27/01/2026</a:t>
             </a:fld>
             <a:endParaRPr lang="en-IE"/>
           </a:p>
@@ -4415,7 +4859,7 @@
           <a:p>
             <a:fld id="{AC2EAE4B-7CCD-44D5-8B66-978E65139741}" type="datetimeFigureOut">
               <a:rPr lang="en-IE" smtClean="0"/>
-              <a:t>05/01/2026</a:t>
+              <a:t>27/01/2026</a:t>
             </a:fld>
             <a:endParaRPr lang="en-IE"/>
           </a:p>
@@ -4625,7 +5069,7 @@
           <a:p>
             <a:fld id="{AC2EAE4B-7CCD-44D5-8B66-978E65139741}" type="datetimeFigureOut">
               <a:rPr lang="en-IE" smtClean="0"/>
-              <a:t>05/01/2026</a:t>
+              <a:t>27/01/2026</a:t>
             </a:fld>
             <a:endParaRPr lang="en-IE"/>
           </a:p>
@@ -4825,7 +5269,7 @@
           <a:p>
             <a:fld id="{AC2EAE4B-7CCD-44D5-8B66-978E65139741}" type="datetimeFigureOut">
               <a:rPr lang="en-IE" smtClean="0"/>
-              <a:t>05/01/2026</a:t>
+              <a:t>27/01/2026</a:t>
             </a:fld>
             <a:endParaRPr lang="en-IE"/>
           </a:p>
@@ -5101,7 +5545,7 @@
           <a:p>
             <a:fld id="{AC2EAE4B-7CCD-44D5-8B66-978E65139741}" type="datetimeFigureOut">
               <a:rPr lang="en-IE" smtClean="0"/>
-              <a:t>05/01/2026</a:t>
+              <a:t>27/01/2026</a:t>
             </a:fld>
             <a:endParaRPr lang="en-IE"/>
           </a:p>
@@ -5369,7 +5813,7 @@
           <a:p>
             <a:fld id="{AC2EAE4B-7CCD-44D5-8B66-978E65139741}" type="datetimeFigureOut">
               <a:rPr lang="en-IE" smtClean="0"/>
-              <a:t>05/01/2026</a:t>
+              <a:t>27/01/2026</a:t>
             </a:fld>
             <a:endParaRPr lang="en-IE"/>
           </a:p>
@@ -5784,7 +6228,7 @@
           <a:p>
             <a:fld id="{AC2EAE4B-7CCD-44D5-8B66-978E65139741}" type="datetimeFigureOut">
               <a:rPr lang="en-IE" smtClean="0"/>
-              <a:t>05/01/2026</a:t>
+              <a:t>27/01/2026</a:t>
             </a:fld>
             <a:endParaRPr lang="en-IE"/>
           </a:p>
@@ -5926,7 +6370,7 @@
           <a:p>
             <a:fld id="{AC2EAE4B-7CCD-44D5-8B66-978E65139741}" type="datetimeFigureOut">
               <a:rPr lang="en-IE" smtClean="0"/>
-              <a:t>05/01/2026</a:t>
+              <a:t>27/01/2026</a:t>
             </a:fld>
             <a:endParaRPr lang="en-IE"/>
           </a:p>
@@ -6039,7 +6483,7 @@
           <a:p>
             <a:fld id="{AC2EAE4B-7CCD-44D5-8B66-978E65139741}" type="datetimeFigureOut">
               <a:rPr lang="en-IE" smtClean="0"/>
-              <a:t>05/01/2026</a:t>
+              <a:t>27/01/2026</a:t>
             </a:fld>
             <a:endParaRPr lang="en-IE"/>
           </a:p>
@@ -6352,7 +6796,7 @@
           <a:p>
             <a:fld id="{AC2EAE4B-7CCD-44D5-8B66-978E65139741}" type="datetimeFigureOut">
               <a:rPr lang="en-IE" smtClean="0"/>
-              <a:t>05/01/2026</a:t>
+              <a:t>27/01/2026</a:t>
             </a:fld>
             <a:endParaRPr lang="en-IE"/>
           </a:p>
@@ -6641,7 +7085,7 @@
           <a:p>
             <a:fld id="{AC2EAE4B-7CCD-44D5-8B66-978E65139741}" type="datetimeFigureOut">
               <a:rPr lang="en-IE" smtClean="0"/>
-              <a:t>05/01/2026</a:t>
+              <a:t>27/01/2026</a:t>
             </a:fld>
             <a:endParaRPr lang="en-IE"/>
           </a:p>
@@ -6884,7 +7328,7 @@
           <a:p>
             <a:fld id="{AC2EAE4B-7CCD-44D5-8B66-978E65139741}" type="datetimeFigureOut">
               <a:rPr lang="en-IE" smtClean="0"/>
-              <a:t>05/01/2026</a:t>
+              <a:t>27/01/2026</a:t>
             </a:fld>
             <a:endParaRPr lang="en-IE"/>
           </a:p>
@@ -8895,7 +9339,7 @@
           </p:nvPr>
         </p:nvPicPr>
         <p:blipFill>
-          <a:blip r:embed="rId2">
+          <a:blip r:embed="rId3">
             <a:extLst>
               <a:ext uri="{28A0092B-C50C-407E-A947-70E740481C1C}">
                 <a14:useLocalDpi xmlns:a14="http://schemas.microsoft.com/office/drawing/2010/main" val="0"/>
@@ -8972,6 +9416,11 @@
   <p:clrMapOvr>
     <a:masterClrMapping/>
   </p:clrMapOvr>
+  <p:extLst>
+    <p:ext uri="{6950BFC3-D8DA-4A85-94F7-54DA5524770B}">
+      <p188:commentRel xmlns:p188="http://schemas.microsoft.com/office/powerpoint/2018/8/main" r:id="rId2"/>
+    </p:ext>
+  </p:extLst>
 </p:sld>
 </file>
 
@@ -9500,7 +9949,7 @@
           <p:nvPr/>
         </p:nvPicPr>
         <p:blipFill>
-          <a:blip r:embed="rId2"/>
+          <a:blip r:embed="rId3"/>
           <a:srcRect l="3936" r="25506" b="2"/>
           <a:stretch>
             <a:fillRect/>
@@ -9526,6 +9975,11 @@
   <p:clrMapOvr>
     <a:masterClrMapping/>
   </p:clrMapOvr>
+  <p:extLst>
+    <p:ext uri="{6950BFC3-D8DA-4A85-94F7-54DA5524770B}">
+      <p188:commentRel xmlns:p188="http://schemas.microsoft.com/office/powerpoint/2018/8/main" r:id="rId2"/>
+    </p:ext>
+  </p:extLst>
 </p:sld>
 </file>
 
@@ -10611,7 +11065,7 @@
           <p:nvPr/>
         </p:nvPicPr>
         <p:blipFill>
-          <a:blip r:embed="rId3">
+          <a:blip r:embed="rId4">
             <a:extLst>
               <a:ext uri="{28A0092B-C50C-407E-A947-70E740481C1C}">
                 <a14:useLocalDpi xmlns:a14="http://schemas.microsoft.com/office/drawing/2010/main" val="0"/>
@@ -10705,6 +11159,11 @@
   <p:clrMapOvr>
     <a:masterClrMapping/>
   </p:clrMapOvr>
+  <p:extLst>
+    <p:ext uri="{6950BFC3-D8DA-4A85-94F7-54DA5524770B}">
+      <p188:commentRel xmlns:p188="http://schemas.microsoft.com/office/powerpoint/2018/8/main" r:id="rId3"/>
+    </p:ext>
+  </p:extLst>
 </p:sld>
 </file>
 
@@ -11190,7 +11649,7 @@
           <p:nvPr/>
         </p:nvPicPr>
         <p:blipFill>
-          <a:blip r:embed="rId2">
+          <a:blip r:embed="rId3">
             <a:extLst>
               <a:ext uri="{28A0092B-C50C-407E-A947-70E740481C1C}">
                 <a14:useLocalDpi xmlns:a14="http://schemas.microsoft.com/office/drawing/2010/main" val="0"/>
@@ -11221,6 +11680,11 @@
   <p:clrMapOvr>
     <a:masterClrMapping/>
   </p:clrMapOvr>
+  <p:extLst>
+    <p:ext uri="{6950BFC3-D8DA-4A85-94F7-54DA5524770B}">
+      <p188:commentRel xmlns:p188="http://schemas.microsoft.com/office/powerpoint/2018/8/main" r:id="rId2"/>
+    </p:ext>
+  </p:extLst>
 </p:sld>
 </file>
 
@@ -11640,7 +12104,7 @@
           <p:nvPr/>
         </p:nvPicPr>
         <p:blipFill>
-          <a:blip r:embed="rId2">
+          <a:blip r:embed="rId3">
             <a:extLst>
               <a:ext uri="{28A0092B-C50C-407E-A947-70E740481C1C}">
                 <a14:useLocalDpi xmlns:a14="http://schemas.microsoft.com/office/drawing/2010/main" val="0"/>
@@ -11780,6 +12244,11 @@
   <p:clrMapOvr>
     <a:masterClrMapping/>
   </p:clrMapOvr>
+  <p:extLst>
+    <p:ext uri="{6950BFC3-D8DA-4A85-94F7-54DA5524770B}">
+      <p188:commentRel xmlns:p188="http://schemas.microsoft.com/office/powerpoint/2018/8/main" r:id="rId2"/>
+    </p:ext>
+  </p:extLst>
 </p:sld>
 </file>
 
@@ -12218,18 +12687,18 @@
           <p:nvPr>
             <p:extLst>
               <p:ext uri="{D42A27DB-BD31-4B8C-83A1-F6EECF244321}">
-                <p14:modId xmlns:p14="http://schemas.microsoft.com/office/powerpoint/2010/main" val="3879798323"/>
+                <p14:modId xmlns:p14="http://schemas.microsoft.com/office/powerpoint/2010/main" val="3698156441"/>
               </p:ext>
             </p:extLst>
           </p:nvPr>
         </p:nvGraphicFramePr>
         <p:xfrm>
-          <a:off x="5987738" y="650494"/>
-          <a:ext cx="5628018" cy="5324142"/>
+          <a:off x="5984947" y="650494"/>
+          <a:ext cx="5630809" cy="5324142"/>
         </p:xfrm>
         <a:graphic>
           <a:graphicData uri="http://schemas.openxmlformats.org/drawingml/2006/chart">
-            <c:chart xmlns:c="http://schemas.openxmlformats.org/drawingml/2006/chart" xmlns:r="http://schemas.openxmlformats.org/officeDocument/2006/relationships" r:id="rId2"/>
+            <c:chart xmlns:c="http://schemas.openxmlformats.org/drawingml/2006/chart" xmlns:r="http://schemas.openxmlformats.org/officeDocument/2006/relationships" r:id="rId3"/>
           </a:graphicData>
         </a:graphic>
       </p:graphicFrame>
@@ -12243,6 +12712,11 @@
   <p:clrMapOvr>
     <a:masterClrMapping/>
   </p:clrMapOvr>
+  <p:extLst>
+    <p:ext uri="{6950BFC3-D8DA-4A85-94F7-54DA5524770B}">
+      <p188:commentRel xmlns:p188="http://schemas.microsoft.com/office/powerpoint/2018/8/main" r:id="rId2"/>
+    </p:ext>
+  </p:extLst>
 </p:sld>
 </file>
 
@@ -12765,7 +13239,7 @@
           <p:nvPr/>
         </p:nvPicPr>
         <p:blipFill>
-          <a:blip r:embed="rId2">
+          <a:blip r:embed="rId3">
             <a:extLst>
               <a:ext uri="{28A0092B-C50C-407E-A947-70E740481C1C}">
                 <a14:useLocalDpi xmlns:a14="http://schemas.microsoft.com/office/drawing/2010/main" val="0"/>
@@ -12803,7 +13277,7 @@
           </p:nvPr>
         </p:nvPicPr>
         <p:blipFill>
-          <a:blip r:embed="rId3">
+          <a:blip r:embed="rId4">
             <a:extLst>
               <a:ext uri="{28A0092B-C50C-407E-A947-70E740481C1C}">
                 <a14:useLocalDpi xmlns:a14="http://schemas.microsoft.com/office/drawing/2010/main" val="0"/>
@@ -12835,6 +13309,11 @@
   <p:clrMapOvr>
     <a:masterClrMapping/>
   </p:clrMapOvr>
+  <p:extLst>
+    <p:ext uri="{6950BFC3-D8DA-4A85-94F7-54DA5524770B}">
+      <p188:commentRel xmlns:p188="http://schemas.microsoft.com/office/powerpoint/2018/8/main" r:id="rId2"/>
+    </p:ext>
+  </p:extLst>
 </p:sld>
 </file>
 
@@ -13245,7 +13724,7 @@
           <p:nvPr/>
         </p:nvPicPr>
         <p:blipFill>
-          <a:blip r:embed="rId2"/>
+          <a:blip r:embed="rId3"/>
           <a:stretch>
             <a:fillRect/>
           </a:stretch>
@@ -13275,7 +13754,7 @@
           <p:nvPr/>
         </p:nvPicPr>
         <p:blipFill>
-          <a:blip r:embed="rId3">
+          <a:blip r:embed="rId4">
             <a:extLst>
               <a:ext uri="{28A0092B-C50C-407E-A947-70E740481C1C}">
                 <a14:useLocalDpi xmlns:a14="http://schemas.microsoft.com/office/drawing/2010/main" val="0"/>
@@ -13317,6 +13796,11 @@
   <p:clrMapOvr>
     <a:masterClrMapping/>
   </p:clrMapOvr>
+  <p:extLst>
+    <p:ext uri="{6950BFC3-D8DA-4A85-94F7-54DA5524770B}">
+      <p188:commentRel xmlns:p188="http://schemas.microsoft.com/office/powerpoint/2018/8/main" r:id="rId2"/>
+    </p:ext>
+  </p:extLst>
 </p:sld>
 </file>
 
@@ -13738,7 +14222,7 @@
           </p:nvPr>
         </p:nvPicPr>
         <p:blipFill>
-          <a:blip r:embed="rId2">
+          <a:blip r:embed="rId3">
             <a:extLst>
               <a:ext uri="{28A0092B-C50C-407E-A947-70E740481C1C}">
                 <a14:useLocalDpi xmlns:a14="http://schemas.microsoft.com/office/drawing/2010/main" val="0"/>
@@ -13886,6 +14370,11 @@
   <p:clrMapOvr>
     <a:masterClrMapping/>
   </p:clrMapOvr>
+  <p:extLst>
+    <p:ext uri="{6950BFC3-D8DA-4A85-94F7-54DA5524770B}">
+      <p188:commentRel xmlns:p188="http://schemas.microsoft.com/office/powerpoint/2018/8/main" r:id="rId2"/>
+    </p:ext>
+  </p:extLst>
 </p:sld>
 </file>
 
@@ -14352,7 +14841,7 @@
           </p:nvPr>
         </p:nvPicPr>
         <p:blipFill>
-          <a:blip r:embed="rId2">
+          <a:blip r:embed="rId3">
             <a:extLst>
               <a:ext uri="{28A0092B-C50C-407E-A947-70E740481C1C}">
                 <a14:useLocalDpi xmlns:a14="http://schemas.microsoft.com/office/drawing/2010/main" val="0"/>
@@ -14389,7 +14878,7 @@
           <p:nvPr/>
         </p:nvPicPr>
         <p:blipFill rotWithShape="1">
-          <a:blip r:embed="rId3">
+          <a:blip r:embed="rId4">
             <a:extLst>
               <a:ext uri="{28A0092B-C50C-407E-A947-70E740481C1C}">
                 <a14:useLocalDpi xmlns:a14="http://schemas.microsoft.com/office/drawing/2010/main" val="0"/>
@@ -14431,6 +14920,11 @@
   <p:clrMapOvr>
     <a:masterClrMapping/>
   </p:clrMapOvr>
+  <p:extLst>
+    <p:ext uri="{6950BFC3-D8DA-4A85-94F7-54DA5524770B}">
+      <p188:commentRel xmlns:p188="http://schemas.microsoft.com/office/powerpoint/2018/8/main" r:id="rId2"/>
+    </p:ext>
+  </p:extLst>
 </p:sld>
 </file>
 
